--- a/字生-演示文稿.pptx
+++ b/字生-演示文稿.pptx
@@ -3575,7 +3575,7 @@
                 <a:ea typeface="微软雅黑"/>
                 <a:cs typeface="微软雅黑"/>
               </a:rPr>
-              <a:t>作品编号 316056 ｜ 作者：牛景飞（北京语言大学）｜ 个人参赛 · 2026</a:t>
+              <a:t>作品编号 316056 ｜ 个人参赛 · 2026</a:t>
             </a:r>
           </a:p>
         </p:txBody>
@@ -3893,7 +3893,7 @@
                 <a:ea typeface="微软雅黑"/>
                 <a:cs typeface="微软雅黑"/>
               </a:rPr>
-              <a:t>《字·生》· 作品编号 316056 · 牛景飞（北京语言大学）</a:t>
+              <a:t>《字·生》· 作品编号 316056</a:t>
             </a:r>
           </a:p>
         </p:txBody>
@@ -4414,7 +4414,7 @@
                 <a:ea typeface="微软雅黑"/>
                 <a:cs typeface="微软雅黑"/>
               </a:rPr>
-              <a:t>《字·生》· 作品编号 316056 · 牛景飞（北京语言大学）</a:t>
+              <a:t>《字·生》· 作品编号 316056</a:t>
             </a:r>
           </a:p>
         </p:txBody>
@@ -4871,7 +4871,7 @@
                 <a:ea typeface="微软雅黑"/>
                 <a:cs typeface="微软雅黑"/>
               </a:rPr>
-              <a:t>《字·生》· 作品编号 316056 · 牛景飞（北京语言大学）</a:t>
+              <a:t>《字·生》· 作品编号 316056</a:t>
             </a:r>
           </a:p>
         </p:txBody>
@@ -6305,7 +6305,7 @@
                 <a:ea typeface="微软雅黑"/>
                 <a:cs typeface="微软雅黑"/>
               </a:rPr>
-              <a:t>《字·生》· 作品编号 316056 · 牛景飞（北京语言大学）</a:t>
+              <a:t>《字·生》· 作品编号 316056</a:t>
             </a:r>
           </a:p>
         </p:txBody>
@@ -7005,7 +7005,7 @@
                 <a:ea typeface="微软雅黑"/>
                 <a:cs typeface="微软雅黑"/>
               </a:rPr>
-              <a:t>《字·生》· 作品编号 316056 · 牛景飞（北京语言大学）</a:t>
+              <a:t>《字·生》· 作品编号 316056</a:t>
             </a:r>
           </a:p>
         </p:txBody>
@@ -7316,7 +7316,7 @@
                 <a:ea typeface="微软雅黑"/>
                 <a:cs typeface="微软雅黑"/>
               </a:rPr>
-              <a:t>作品编号 316056 · 牛景飞（北京语言大学）· 2026</a:t>
+              <a:t>作品编号 316056 · 2026</a:t>
             </a:r>
           </a:p>
         </p:txBody>
@@ -8298,7 +8298,7 @@
                 <a:ea typeface="微软雅黑"/>
                 <a:cs typeface="微软雅黑"/>
               </a:rPr>
-              <a:t>《字·生》· 作品编号 316056 · 牛景飞（北京语言大学）</a:t>
+              <a:t>《字·生》· 作品编号 316056</a:t>
             </a:r>
           </a:p>
         </p:txBody>
@@ -9124,7 +9124,7 @@
                 <a:ea typeface="微软雅黑"/>
                 <a:cs typeface="微软雅黑"/>
               </a:rPr>
-              <a:t>《字·生》· 作品编号 316056 · 牛景飞（北京语言大学）</a:t>
+              <a:t>《字·生》· 作品编号 316056</a:t>
             </a:r>
           </a:p>
         </p:txBody>
@@ -10968,7 +10968,7 @@
                 <a:ea typeface="微软雅黑"/>
                 <a:cs typeface="微软雅黑"/>
               </a:rPr>
-              <a:t>《字·生》· 作品编号 316056 · 牛景飞（北京语言大学）</a:t>
+              <a:t>《字·生》· 作品编号 316056</a:t>
             </a:r>
           </a:p>
         </p:txBody>
@@ -11327,7 +11327,7 @@
                 <a:ea typeface="微软雅黑"/>
                 <a:cs typeface="微软雅黑"/>
               </a:rPr>
-              <a:t>《字·生》· 作品编号 316056 · 牛景飞（北京语言大学）</a:t>
+              <a:t>《字·生》· 作品编号 316056</a:t>
             </a:r>
           </a:p>
         </p:txBody>
@@ -11816,7 +11816,7 @@
                 <a:ea typeface="微软雅黑"/>
                 <a:cs typeface="微软雅黑"/>
               </a:rPr>
-              <a:t>《字·生》· 作品编号 316056 · 牛景飞（北京语言大学）</a:t>
+              <a:t>《字·生》· 作品编号 316056</a:t>
             </a:r>
           </a:p>
         </p:txBody>
@@ -12302,7 +12302,7 @@
                 <a:ea typeface="微软雅黑"/>
                 <a:cs typeface="微软雅黑"/>
               </a:rPr>
-              <a:t>《字·生》· 作品编号 316056 · 牛景飞（北京语言大学）</a:t>
+              <a:t>《字·生》· 作品编号 316056</a:t>
             </a:r>
           </a:p>
         </p:txBody>
@@ -12823,7 +12823,7 @@
                 <a:ea typeface="微软雅黑"/>
                 <a:cs typeface="微软雅黑"/>
               </a:rPr>
-              <a:t>《字·生》· 作品编号 316056 · 牛景飞（北京语言大学）</a:t>
+              <a:t>《字·生》· 作品编号 316056</a:t>
             </a:r>
           </a:p>
         </p:txBody>
@@ -13312,7 +13312,7 @@
                 <a:ea typeface="微软雅黑"/>
                 <a:cs typeface="微软雅黑"/>
               </a:rPr>
-              <a:t>《字·生》· 作品编号 316056 · 牛景飞（北京语言大学）</a:t>
+              <a:t>《字·生》· 作品编号 316056</a:t>
             </a:r>
           </a:p>
         </p:txBody>
